--- a/media/SkillCoach_Deck.pptx
+++ b/media/SkillCoach_Deck.pptx
@@ -10887,12 +10887,12 @@
         </p:nvSpPr>
         <p:spPr>
           <a:xfrm>
-            <a:off x="548640" y="1874520"/>
-            <a:ext cx="3454298" cy="4206240"/>
+            <a:off x="548640" y="1783080"/>
+            <a:ext cx="6858000" cy="1371600"/>
           </a:xfrm>
           <a:prstGeom prst="roundRect">
             <a:avLst>
-              <a:gd name="adj" fmla="val 3177"/>
+              <a:gd name="adj" fmla="val 8000"/>
             </a:avLst>
           </a:prstGeom>
           <a:solidFill>
@@ -10921,8 +10921,8 @@
         </p:nvSpPr>
         <p:spPr>
           <a:xfrm>
-            <a:off x="868680" y="2103120"/>
-            <a:ext cx="2814218" cy="868680"/>
+            <a:off x="777240" y="1892808"/>
+            <a:ext cx="2286000" cy="566928"/>
           </a:xfrm>
           <a:prstGeom prst="rect">
             <a:avLst/>
@@ -10938,7 +10938,7 @@
               <a:buNone/>
             </a:pPr>
             <a:r>
-              <a:rPr lang="en-US" sz="4000" b="1" dirty="0">
+              <a:rPr lang="en-US" sz="3400" b="1" dirty="0">
                 <a:solidFill>
                   <a:srgbClr val="4F46E5"/>
                 </a:solidFill>
@@ -10948,7 +10948,7 @@
               </a:rPr>
               <a:t>&lt; 50%</a:t>
             </a:r>
-            <a:endParaRPr lang="en-US" sz="4000" dirty="0"/>
+            <a:endParaRPr lang="en-US" sz="3400" dirty="0"/>
           </a:p>
         </p:txBody>
       </p:sp>
@@ -10960,8 +10960,8 @@
         </p:nvSpPr>
         <p:spPr>
           <a:xfrm>
-            <a:off x="868680" y="3017520"/>
-            <a:ext cx="2814218" cy="685800"/>
+            <a:off x="777240" y="2496312"/>
+            <a:ext cx="2286000" cy="566928"/>
           </a:xfrm>
           <a:prstGeom prst="rect">
             <a:avLst/>
@@ -10977,7 +10977,7 @@
               <a:buNone/>
             </a:pPr>
             <a:r>
-              <a:rPr lang="en-US" sz="1300" dirty="0">
+              <a:rPr lang="en-US" sz="1100" dirty="0">
                 <a:solidFill>
                   <a:srgbClr val="334155"/>
                 </a:solidFill>
@@ -10991,7 +10991,7 @@
               <a:buNone/>
             </a:pPr>
             <a:r>
-              <a:rPr lang="en-US" sz="1300" b="1" dirty="0">
+              <a:rPr lang="en-US" sz="1100" b="1" dirty="0">
                 <a:solidFill>
                   <a:srgbClr val="64748B"/>
                 </a:solidFill>
@@ -11001,7 +11001,7 @@
               </a:rPr>
               <a:t>[S9]</a:t>
             </a:r>
-            <a:endParaRPr lang="en-US" sz="1300" dirty="0"/>
+            <a:endParaRPr lang="en-US" sz="1100" dirty="0"/>
           </a:p>
         </p:txBody>
       </p:sp>
@@ -11013,8 +11013,8 @@
         </p:nvSpPr>
         <p:spPr>
           <a:xfrm>
-            <a:off x="868680" y="3840480"/>
-            <a:ext cx="2814218" cy="0"/>
+            <a:off x="3246120" y="1965960"/>
+            <a:ext cx="0" cy="1005840"/>
           </a:xfrm>
           <a:prstGeom prst="line">
             <a:avLst/>
@@ -11036,8 +11036,8 @@
         </p:nvSpPr>
         <p:spPr>
           <a:xfrm>
-            <a:off x="868680" y="4023360"/>
-            <a:ext cx="2814218" cy="640080"/>
+            <a:off x="3429000" y="1920240"/>
+            <a:ext cx="3794760" cy="292608"/>
           </a:xfrm>
           <a:prstGeom prst="rect">
             <a:avLst/>
@@ -11053,7 +11053,7 @@
               <a:buNone/>
             </a:pPr>
             <a:r>
-              <a:rPr lang="en-US" sz="1600" b="1" dirty="0">
+              <a:rPr lang="en-US" sz="1400" b="1" dirty="0">
                 <a:solidFill>
                   <a:srgbClr val="0F172A"/>
                 </a:solidFill>
@@ -11063,7 +11063,7 @@
               </a:rPr>
               <a:t>People leave before they are productive</a:t>
             </a:r>
-            <a:endParaRPr lang="en-US" sz="1600" dirty="0"/>
+            <a:endParaRPr lang="en-US" sz="1400" dirty="0"/>
           </a:p>
         </p:txBody>
       </p:sp>
@@ -11075,8 +11075,8 @@
         </p:nvSpPr>
         <p:spPr>
           <a:xfrm>
-            <a:off x="868680" y="4709160"/>
-            <a:ext cx="2814218" cy="1234440"/>
+            <a:off x="3429000" y="2258568"/>
+            <a:ext cx="3794760" cy="804672"/>
           </a:xfrm>
           <a:prstGeom prst="rect">
             <a:avLst/>
@@ -11092,7 +11092,7 @@
               <a:buNone/>
             </a:pPr>
             <a:r>
-              <a:rPr lang="en-US" sz="1400" dirty="0">
+              <a:rPr lang="en-US" sz="1300" dirty="0">
                 <a:solidFill>
                   <a:srgbClr val="334155"/>
                 </a:solidFill>
@@ -11102,7 +11102,7 @@
               </a:rPr>
               <a:t>Contact-center attrition averages 39% globally [S7] and 43-45% in the Philippines [S6].</a:t>
             </a:r>
-            <a:endParaRPr lang="en-US" sz="1400" dirty="0"/>
+            <a:endParaRPr lang="en-US" sz="1300" dirty="0"/>
           </a:p>
         </p:txBody>
       </p:sp>
@@ -11114,12 +11114,12 @@
         </p:nvSpPr>
         <p:spPr>
           <a:xfrm>
-            <a:off x="4368698" y="1874520"/>
-            <a:ext cx="3454298" cy="4206240"/>
+            <a:off x="548640" y="3291840"/>
+            <a:ext cx="6858000" cy="1371600"/>
           </a:xfrm>
           <a:prstGeom prst="roundRect">
             <a:avLst>
-              <a:gd name="adj" fmla="val 3177"/>
+              <a:gd name="adj" fmla="val 8000"/>
             </a:avLst>
           </a:prstGeom>
           <a:solidFill>
@@ -11148,8 +11148,8 @@
         </p:nvSpPr>
         <p:spPr>
           <a:xfrm>
-            <a:off x="4688738" y="2103120"/>
-            <a:ext cx="2814218" cy="868680"/>
+            <a:off x="777240" y="3401568"/>
+            <a:ext cx="2286000" cy="566928"/>
           </a:xfrm>
           <a:prstGeom prst="rect">
             <a:avLst/>
@@ -11165,7 +11165,7 @@
               <a:buNone/>
             </a:pPr>
             <a:r>
-              <a:rPr lang="en-US" sz="4000" b="1" dirty="0">
+              <a:rPr lang="en-US" sz="3400" b="1" dirty="0">
                 <a:solidFill>
                   <a:srgbClr val="4F46E5"/>
                 </a:solidFill>
@@ -11175,7 +11175,7 @@
               </a:rPr>
               <a:t>13.7 h</a:t>
             </a:r>
-            <a:endParaRPr lang="en-US" sz="4000" dirty="0"/>
+            <a:endParaRPr lang="en-US" sz="3400" dirty="0"/>
           </a:p>
         </p:txBody>
       </p:sp>
@@ -11187,8 +11187,8 @@
         </p:nvSpPr>
         <p:spPr>
           <a:xfrm>
-            <a:off x="4688738" y="3017520"/>
-            <a:ext cx="2814218" cy="685800"/>
+            <a:off x="777240" y="4005072"/>
+            <a:ext cx="2286000" cy="566928"/>
           </a:xfrm>
           <a:prstGeom prst="rect">
             <a:avLst/>
@@ -11204,7 +11204,7 @@
               <a:buNone/>
             </a:pPr>
             <a:r>
-              <a:rPr lang="en-US" sz="1300" dirty="0">
+              <a:rPr lang="en-US" sz="1100" dirty="0">
                 <a:solidFill>
                   <a:srgbClr val="334155"/>
                 </a:solidFill>
@@ -11218,7 +11218,7 @@
               <a:buNone/>
             </a:pPr>
             <a:r>
-              <a:rPr lang="en-US" sz="1300" b="1" dirty="0">
+              <a:rPr lang="en-US" sz="1100" b="1" dirty="0">
                 <a:solidFill>
                   <a:srgbClr val="64748B"/>
                 </a:solidFill>
@@ -11228,7 +11228,7 @@
               </a:rPr>
               <a:t>[S1]</a:t>
             </a:r>
-            <a:endParaRPr lang="en-US" sz="1300" dirty="0"/>
+            <a:endParaRPr lang="en-US" sz="1100" dirty="0"/>
           </a:p>
         </p:txBody>
       </p:sp>
@@ -11240,8 +11240,8 @@
         </p:nvSpPr>
         <p:spPr>
           <a:xfrm>
-            <a:off x="4688738" y="3840480"/>
-            <a:ext cx="2814218" cy="0"/>
+            <a:off x="3246120" y="3474720"/>
+            <a:ext cx="0" cy="1005840"/>
           </a:xfrm>
           <a:prstGeom prst="line">
             <a:avLst/>
@@ -11263,8 +11263,8 @@
         </p:nvSpPr>
         <p:spPr>
           <a:xfrm>
-            <a:off x="4688738" y="4023360"/>
-            <a:ext cx="2814218" cy="640080"/>
+            <a:off x="3429000" y="3429000"/>
+            <a:ext cx="3794760" cy="292608"/>
           </a:xfrm>
           <a:prstGeom prst="rect">
             <a:avLst/>
@@ -11280,7 +11280,7 @@
               <a:buNone/>
             </a:pPr>
             <a:r>
-              <a:rPr lang="en-US" sz="1600" b="1" dirty="0">
+              <a:rPr lang="en-US" sz="1400" b="1" dirty="0">
                 <a:solidFill>
                   <a:srgbClr val="0F172A"/>
                 </a:solidFill>
@@ -11290,7 +11290,7 @@
               </a:rPr>
               <a:t>Practice doesn't scale</a:t>
             </a:r>
-            <a:endParaRPr lang="en-US" sz="1600" dirty="0"/>
+            <a:endParaRPr lang="en-US" sz="1400" dirty="0"/>
           </a:p>
         </p:txBody>
       </p:sp>
@@ -11302,8 +11302,8 @@
         </p:nvSpPr>
         <p:spPr>
           <a:xfrm>
-            <a:off x="4688738" y="4709160"/>
-            <a:ext cx="2814218" cy="1234440"/>
+            <a:off x="3429000" y="3767328"/>
+            <a:ext cx="3794760" cy="804672"/>
           </a:xfrm>
           <a:prstGeom prst="rect">
             <a:avLst/>
@@ -11319,7 +11319,7 @@
               <a:buNone/>
             </a:pPr>
             <a:r>
-              <a:rPr lang="en-US" sz="1400" dirty="0">
+              <a:rPr lang="en-US" sz="1300" dirty="0">
                 <a:solidFill>
                   <a:srgbClr val="334155"/>
                 </a:solidFill>
@@ -11329,7 +11329,7 @@
               </a:rPr>
               <a:t>A human-operated simulation costs about US$49 per 30-minute session [S23].</a:t>
             </a:r>
-            <a:endParaRPr lang="en-US" sz="1400" dirty="0"/>
+            <a:endParaRPr lang="en-US" sz="1300" dirty="0"/>
           </a:p>
         </p:txBody>
       </p:sp>
@@ -11341,12 +11341,12 @@
         </p:nvSpPr>
         <p:spPr>
           <a:xfrm>
-            <a:off x="8188757" y="1874520"/>
-            <a:ext cx="3454298" cy="4206240"/>
+            <a:off x="548640" y="4800600"/>
+            <a:ext cx="6858000" cy="1371600"/>
           </a:xfrm>
           <a:prstGeom prst="roundRect">
             <a:avLst>
-              <a:gd name="adj" fmla="val 3177"/>
+              <a:gd name="adj" fmla="val 8000"/>
             </a:avLst>
           </a:prstGeom>
           <a:solidFill>
@@ -11375,8 +11375,8 @@
         </p:nvSpPr>
         <p:spPr>
           <a:xfrm>
-            <a:off x="8508797" y="2103120"/>
-            <a:ext cx="2814218" cy="868680"/>
+            <a:off x="777240" y="4910328"/>
+            <a:ext cx="2286000" cy="566928"/>
           </a:xfrm>
           <a:prstGeom prst="rect">
             <a:avLst/>
@@ -11392,7 +11392,7 @@
               <a:buNone/>
             </a:pPr>
             <a:r>
-              <a:rPr lang="en-US" sz="4000" b="1" dirty="0">
+              <a:rPr lang="en-US" sz="3400" b="1" dirty="0">
                 <a:solidFill>
                   <a:srgbClr val="E11D48"/>
                 </a:solidFill>
@@ -11402,7 +11402,7 @@
               </a:rPr>
               <a:t>HK$66.4M</a:t>
             </a:r>
-            <a:endParaRPr lang="en-US" sz="4000" dirty="0"/>
+            <a:endParaRPr lang="en-US" sz="3400" dirty="0"/>
           </a:p>
         </p:txBody>
       </p:sp>
@@ -11414,8 +11414,8 @@
         </p:nvSpPr>
         <p:spPr>
           <a:xfrm>
-            <a:off x="8508797" y="3017520"/>
-            <a:ext cx="2814218" cy="685800"/>
+            <a:off x="777240" y="5513832"/>
+            <a:ext cx="2286000" cy="566928"/>
           </a:xfrm>
           <a:prstGeom prst="rect">
             <a:avLst/>
@@ -11431,7 +11431,7 @@
               <a:buNone/>
             </a:pPr>
             <a:r>
-              <a:rPr lang="en-US" sz="1300" dirty="0">
+              <a:rPr lang="en-US" sz="1100" dirty="0">
                 <a:solidFill>
                   <a:srgbClr val="334155"/>
                 </a:solidFill>
@@ -11445,7 +11445,7 @@
               <a:buNone/>
             </a:pPr>
             <a:r>
-              <a:rPr lang="en-US" sz="1300" b="1" dirty="0">
+              <a:rPr lang="en-US" sz="1100" b="1" dirty="0">
                 <a:solidFill>
                   <a:srgbClr val="64748B"/>
                 </a:solidFill>
@@ -11455,7 +11455,7 @@
               </a:rPr>
               <a:t>[S20]</a:t>
             </a:r>
-            <a:endParaRPr lang="en-US" sz="1300" dirty="0"/>
+            <a:endParaRPr lang="en-US" sz="1100" dirty="0"/>
           </a:p>
         </p:txBody>
       </p:sp>
@@ -11467,8 +11467,8 @@
         </p:nvSpPr>
         <p:spPr>
           <a:xfrm>
-            <a:off x="8508797" y="3840480"/>
-            <a:ext cx="2814218" cy="0"/>
+            <a:off x="3246120" y="4983480"/>
+            <a:ext cx="0" cy="1005840"/>
           </a:xfrm>
           <a:prstGeom prst="line">
             <a:avLst/>
@@ -11490,8 +11490,8 @@
         </p:nvSpPr>
         <p:spPr>
           <a:xfrm>
-            <a:off x="8508797" y="4023360"/>
-            <a:ext cx="2814218" cy="640080"/>
+            <a:off x="3429000" y="4937760"/>
+            <a:ext cx="3794760" cy="292608"/>
           </a:xfrm>
           <a:prstGeom prst="rect">
             <a:avLst/>
@@ -11507,7 +11507,7 @@
               <a:buNone/>
             </a:pPr>
             <a:r>
-              <a:rPr lang="en-US" sz="1600" b="1" dirty="0">
+              <a:rPr lang="en-US" sz="1400" b="1" dirty="0">
                 <a:solidFill>
                   <a:srgbClr val="0F172A"/>
                 </a:solidFill>
@@ -11517,7 +11517,7 @@
               </a:rPr>
               <a:t>One sentence can be a conduct failure</a:t>
             </a:r>
-            <a:endParaRPr lang="en-US" sz="1600" dirty="0"/>
+            <a:endParaRPr lang="en-US" sz="1400" dirty="0"/>
           </a:p>
         </p:txBody>
       </p:sp>
@@ -11529,8 +11529,8 @@
         </p:nvSpPr>
         <p:spPr>
           <a:xfrm>
-            <a:off x="8508797" y="4709160"/>
-            <a:ext cx="2814218" cy="1234440"/>
+            <a:off x="3429000" y="5276088"/>
+            <a:ext cx="3794760" cy="804672"/>
           </a:xfrm>
           <a:prstGeom prst="rect">
             <a:avLst/>
@@ -11546,7 +11546,7 @@
               <a:buNone/>
             </a:pPr>
             <a:r>
-              <a:rPr lang="en-US" sz="1400" dirty="0">
+              <a:rPr lang="en-US" sz="1300" dirty="0">
                 <a:solidFill>
                   <a:srgbClr val="334155"/>
                 </a:solidFill>
@@ -11556,7 +11556,70 @@
               </a:rPr>
               <a:t>MAS expects representatives to be competent before they advise on their own [S29] and acts against firms and individuals [S21].</a:t>
             </a:r>
-            <a:endParaRPr lang="en-US" sz="1400" dirty="0"/>
+            <a:endParaRPr lang="en-US" sz="1300" dirty="0"/>
+          </a:p>
+        </p:txBody>
+      </p:sp>
+      <p:pic>
+        <p:nvPicPr>
+          <p:cNvPr id="23" name="Image 0" descr="A busy manager on the phone while a new hire faces a customer alone">    </p:cNvPr>
+          <p:cNvPicPr>
+            <a:picLocks noChangeAspect="1"/>
+          </p:cNvPicPr>
+          <p:nvPr/>
+        </p:nvPicPr>
+        <p:blipFill>
+          <a:blip r:embed="rId1"/>
+          <a:stretch>
+            <a:fillRect/>
+          </a:stretch>
+        </p:blipFill>
+        <p:spPr>
+          <a:xfrm>
+            <a:off x="7726680" y="2286000"/>
+            <a:ext cx="3916375" cy="2202961"/>
+          </a:xfrm>
+          <a:prstGeom prst="rect">
+            <a:avLst/>
+          </a:prstGeom>
+        </p:spPr>
+      </p:pic>
+      <p:sp>
+        <p:nvSpPr>
+          <p:cNvPr id="24" name="Text 20"/>
+          <p:cNvSpPr txBox="1"/>
+          <p:nvPr/>
+        </p:nvSpPr>
+        <p:spPr>
+          <a:xfrm>
+            <a:off x="7726680" y="4671841"/>
+            <a:ext cx="3916375" cy="502920"/>
+          </a:xfrm>
+          <a:prstGeom prst="rect">
+            <a:avLst/>
+          </a:prstGeom>
+          <a:noFill/>
+          <a:ln/>
+        </p:spPr>
+        <p:txBody>
+          <a:bodyPr wrap="square" lIns="0" tIns="0" rIns="0" bIns="0" rtlCol="0" anchor="t"/>
+          <a:lstStyle/>
+          <a:p>
+            <a:pPr indent="0" marL="0">
+              <a:buNone/>
+            </a:pPr>
+            <a:r>
+              <a:rPr lang="en-US" sz="1200" i="1" dirty="0">
+                <a:solidFill>
+                  <a:srgbClr val="64748B"/>
+                </a:solidFill>
+                <a:latin typeface="Segoe UI" pitchFamily="34" charset="0"/>
+                <a:ea typeface="Segoe UI" pitchFamily="34" charset="-122"/>
+                <a:cs typeface="Segoe UI" pitchFamily="34" charset="-120"/>
+              </a:rPr>
+              <a:t>Today: senior people are busy, so the new hire learns in front of a real customer.</a:t>
+            </a:r>
+            <a:endParaRPr lang="en-US" sz="1200" dirty="0"/>
           </a:p>
         </p:txBody>
       </p:sp>
